--- a/2520030011_CSE.pptx
+++ b/2520030011_CSE.pptx
@@ -235,7 +235,7 @@
           <a:p>
             <a:fld id="{469F6064-4237-BA4C-A655-B64A9E0DF723}" type="datetimeFigureOut">
               <a:rPr lang="en-US" smtClean="0"/>
-              <a:t>3/9/2026</a:t>
+              <a:t>3/10/2026</a:t>
             </a:fld>
             <a:endParaRPr lang="en-US"/>
           </a:p>
@@ -442,7 +442,7 @@
           <a:p>
             <a:fld id="{85A854B6-73EE-3647-B9F0-9FDDAF047BDA}" type="datetimeFigureOut">
               <a:rPr lang="en-US" smtClean="0"/>
-              <a:t>3/9/2026</a:t>
+              <a:t>3/10/2026</a:t>
             </a:fld>
             <a:endParaRPr lang="en-US"/>
           </a:p>
@@ -859,7 +859,7 @@
           <a:p>
             <a:fld id="{3BF734CB-DFAB-944A-8037-9643745D8F20}" type="datetime1">
               <a:rPr lang="en-IN" smtClean="0"/>
-              <a:t>09-03-2026</a:t>
+              <a:t>10-03-2026</a:t>
             </a:fld>
             <a:endParaRPr lang="en-US"/>
           </a:p>
@@ -1062,7 +1062,7 @@
           <a:p>
             <a:fld id="{B04444B0-6575-954F-AAA2-CB0D0417F745}" type="datetime1">
               <a:rPr lang="en-IN" smtClean="0"/>
-              <a:t>09-03-2026</a:t>
+              <a:t>10-03-2026</a:t>
             </a:fld>
             <a:endParaRPr lang="en-US"/>
           </a:p>
@@ -1275,7 +1275,7 @@
           <a:p>
             <a:fld id="{6DE7A436-9AA5-6C4B-AFF1-C34F60A9AB89}" type="datetime1">
               <a:rPr lang="en-IN" smtClean="0"/>
-              <a:t>09-03-2026</a:t>
+              <a:t>10-03-2026</a:t>
             </a:fld>
             <a:endParaRPr lang="en-US"/>
           </a:p>
@@ -1500,7 +1500,7 @@
           <a:p>
             <a:fld id="{6BF141C7-EF5A-1D4A-89F0-79C7DE818D53}" type="datetime1">
               <a:rPr lang="en-IN" smtClean="0"/>
-              <a:t>09-03-2026</a:t>
+              <a:t>10-03-2026</a:t>
             </a:fld>
             <a:endParaRPr lang="en-US"/>
           </a:p>
@@ -1703,7 +1703,7 @@
           <a:p>
             <a:fld id="{8C868A0C-C998-984C-ABE3-A33473D7CABD}" type="datetime1">
               <a:rPr lang="en-IN" smtClean="0"/>
-              <a:t>09-03-2026</a:t>
+              <a:t>10-03-2026</a:t>
             </a:fld>
             <a:endParaRPr lang="en-US"/>
           </a:p>
@@ -1982,7 +1982,7 @@
           <a:p>
             <a:fld id="{BDD2EF84-6667-8447-AC88-082F9D71D82C}" type="datetime1">
               <a:rPr lang="en-IN" smtClean="0"/>
-              <a:t>09-03-2026</a:t>
+              <a:t>10-03-2026</a:t>
             </a:fld>
             <a:endParaRPr lang="en-US"/>
           </a:p>
@@ -2253,7 +2253,7 @@
           <a:p>
             <a:fld id="{61563FD6-5C64-304A-9680-469E8D83D1BF}" type="datetime1">
               <a:rPr lang="en-IN" smtClean="0"/>
-              <a:t>09-03-2026</a:t>
+              <a:t>10-03-2026</a:t>
             </a:fld>
             <a:endParaRPr lang="en-US"/>
           </a:p>
@@ -2671,7 +2671,7 @@
           <a:p>
             <a:fld id="{D93985EC-8C41-0649-B43C-28421C497AA5}" type="datetime1">
               <a:rPr lang="en-IN" smtClean="0"/>
-              <a:t>09-03-2026</a:t>
+              <a:t>10-03-2026</a:t>
             </a:fld>
             <a:endParaRPr lang="en-US"/>
           </a:p>
@@ -2874,7 +2874,7 @@
           <a:p>
             <a:fld id="{9C5272DB-0103-AF4C-A22D-07421EC406AD}" type="datetime1">
               <a:rPr lang="en-IN" smtClean="0"/>
-              <a:t>09-03-2026</a:t>
+              <a:t>10-03-2026</a:t>
             </a:fld>
             <a:endParaRPr lang="en-US"/>
           </a:p>
@@ -3211,7 +3211,7 @@
           <a:p>
             <a:fld id="{6918335F-2E5B-B14E-9706-E237C81E4155}" type="datetime1">
               <a:rPr lang="en-IN" smtClean="0"/>
-              <a:t>09-03-2026</a:t>
+              <a:t>10-03-2026</a:t>
             </a:fld>
             <a:endParaRPr lang="en-US"/>
           </a:p>
@@ -3482,7 +3482,7 @@
           <a:p>
             <a:fld id="{15BD6649-7156-A341-B9F2-F045B7551E13}" type="datetime1">
               <a:rPr lang="en-IN" smtClean="0"/>
-              <a:t>09-03-2026</a:t>
+              <a:t>10-03-2026</a:t>
             </a:fld>
             <a:endParaRPr lang="en-US"/>
           </a:p>
@@ -3900,7 +3900,7 @@
           <a:p>
             <a:fld id="{C9977CD1-E97C-BA41-8E49-9F39B98FFBE8}" type="datetime1">
               <a:rPr lang="en-IN" smtClean="0"/>
-              <a:t>09-03-2026</a:t>
+              <a:t>10-03-2026</a:t>
             </a:fld>
             <a:endParaRPr lang="en-US"/>
           </a:p>
@@ -4045,7 +4045,7 @@
           <a:p>
             <a:fld id="{F3DDBCA1-9406-7A44-8A76-1046B4040777}" type="datetime1">
               <a:rPr lang="en-IN" smtClean="0"/>
-              <a:t>09-03-2026</a:t>
+              <a:t>10-03-2026</a:t>
             </a:fld>
             <a:endParaRPr lang="en-US"/>
           </a:p>
@@ -4161,7 +4161,7 @@
           <a:p>
             <a:fld id="{C7FB085D-B69B-9C45-93A5-77F47F2F6792}" type="datetime1">
               <a:rPr lang="en-IN" smtClean="0"/>
-              <a:t>09-03-2026</a:t>
+              <a:t>10-03-2026</a:t>
             </a:fld>
             <a:endParaRPr lang="en-US"/>
           </a:p>
@@ -4477,7 +4477,7 @@
           <a:p>
             <a:fld id="{C61B69B7-E8EF-6346-9390-671C5B22ACF3}" type="datetime1">
               <a:rPr lang="en-IN" smtClean="0"/>
-              <a:t>09-03-2026</a:t>
+              <a:t>10-03-2026</a:t>
             </a:fld>
             <a:endParaRPr lang="en-US"/>
           </a:p>
@@ -4769,7 +4769,7 @@
           <a:p>
             <a:fld id="{B920709D-BF3C-5743-B60D-B01C16014A7B}" type="datetime1">
               <a:rPr lang="en-IN" smtClean="0"/>
-              <a:t>09-03-2026</a:t>
+              <a:t>10-03-2026</a:t>
             </a:fld>
             <a:endParaRPr lang="en-US"/>
           </a:p>
@@ -5015,7 +5015,7 @@
           <a:p>
             <a:fld id="{2885D85A-3465-384D-962A-D11BB8B39525}" type="datetime1">
               <a:rPr lang="en-IN" smtClean="0"/>
-              <a:t>09-03-2026</a:t>
+              <a:t>10-03-2026</a:t>
             </a:fld>
             <a:endParaRPr lang="en-US"/>
           </a:p>
@@ -5589,7 +5589,7 @@
           <a:p>
             <a:fld id="{29F4C6E9-161C-B44B-AD70-8813DADCDED1}" type="datetime1">
               <a:rPr lang="en-IN" smtClean="0"/>
-              <a:t>09-03-2026</a:t>
+              <a:t>10-03-2026</a:t>
             </a:fld>
             <a:endParaRPr lang="en-US"/>
           </a:p>
@@ -6146,7 +6146,7 @@
           <a:p>
             <a:fld id="{D4ABCEED-36AB-D94A-B562-4D3E096B39D1}" type="datetime1">
               <a:rPr lang="en-IN" smtClean="0"/>
-              <a:t>09-03-2026</a:t>
+              <a:t>10-03-2026</a:t>
             </a:fld>
             <a:endParaRPr lang="en-US"/>
           </a:p>
@@ -6406,7 +6406,7 @@
                   <a:srgbClr val="00B050"/>
                 </a:solidFill>
               </a:rPr>
-              <a:t>Supervisor Name: Dr.Y. Ashok, N.M. Deepika </a:t>
+              <a:t>Supervisor Name:  N.M. Deepika </a:t>
             </a:r>
           </a:p>
           <a:p>
@@ -6682,7 +6682,7 @@
           <a:p>
             <a:fld id="{9C5272DB-0103-AF4C-A22D-07421EC406AD}" type="datetime1">
               <a:rPr lang="en-IN" smtClean="0"/>
-              <a:t>09-03-2026</a:t>
+              <a:t>10-03-2026</a:t>
             </a:fld>
             <a:endParaRPr lang="en-US"/>
           </a:p>
@@ -6994,7 +6994,7 @@
           <a:p>
             <a:fld id="{20A639D7-EAE1-7C4A-AC63-30DD6B16DE20}" type="datetime1">
               <a:rPr lang="en-IN" smtClean="0"/>
-              <a:t>09-03-2026</a:t>
+              <a:t>10-03-2026</a:t>
             </a:fld>
             <a:endParaRPr lang="en-US"/>
           </a:p>
@@ -7217,7 +7217,7 @@
           <a:p>
             <a:fld id="{9C5272DB-0103-AF4C-A22D-07421EC406AD}" type="datetime1">
               <a:rPr lang="en-IN" smtClean="0"/>
-              <a:t>09-03-2026</a:t>
+              <a:t>10-03-2026</a:t>
             </a:fld>
             <a:endParaRPr lang="en-US"/>
           </a:p>
@@ -7361,7 +7361,7 @@
           <a:p>
             <a:fld id="{9C5272DB-0103-AF4C-A22D-07421EC406AD}" type="datetime1">
               <a:rPr lang="en-IN" smtClean="0"/>
-              <a:t>09-03-2026</a:t>
+              <a:t>10-03-2026</a:t>
             </a:fld>
             <a:endParaRPr lang="en-US"/>
           </a:p>
@@ -7597,7 +7597,7 @@
           <a:p>
             <a:fld id="{9C5272DB-0103-AF4C-A22D-07421EC406AD}" type="datetime1">
               <a:rPr lang="en-IN" smtClean="0"/>
-              <a:t>09-03-2026</a:t>
+              <a:t>10-03-2026</a:t>
             </a:fld>
             <a:endParaRPr lang="en-US"/>
           </a:p>
@@ -7662,10 +7662,10 @@
       </p:sp>
       <p:pic>
         <p:nvPicPr>
-          <p:cNvPr id="8" name="Picture 7">
-            <a:extLst>
-              <a:ext uri="{FF2B5EF4-FFF2-40B4-BE49-F238E27FC236}">
-                <a16:creationId xmlns:a16="http://schemas.microsoft.com/office/drawing/2014/main" id="{710A62F8-C830-464F-BCEC-A9811A9B0A8B}"/>
+          <p:cNvPr id="3" name="Picture 2">
+            <a:extLst>
+              <a:ext uri="{FF2B5EF4-FFF2-40B4-BE49-F238E27FC236}">
+                <a16:creationId xmlns:a16="http://schemas.microsoft.com/office/drawing/2014/main" id="{699240C2-7B1D-493A-8CFB-997A80CAAE3C}"/>
               </a:ext>
             </a:extLst>
           </p:cNvPr>
@@ -7682,8 +7682,8 @@
         </p:blipFill>
         <p:spPr>
           <a:xfrm>
-            <a:off x="335683" y="809906"/>
-            <a:ext cx="3057952" cy="4001058"/>
+            <a:off x="256292" y="789471"/>
+            <a:ext cx="3087543" cy="5367550"/>
           </a:xfrm>
           <a:prstGeom prst="rect">
             <a:avLst/>
@@ -7692,10 +7692,10 @@
       </p:pic>
       <p:pic>
         <p:nvPicPr>
-          <p:cNvPr id="10" name="Picture 9">
-            <a:extLst>
-              <a:ext uri="{FF2B5EF4-FFF2-40B4-BE49-F238E27FC236}">
-                <a16:creationId xmlns:a16="http://schemas.microsoft.com/office/drawing/2014/main" id="{FA5691AB-D502-4E87-A461-95DC7EA774BC}"/>
+          <p:cNvPr id="9" name="Picture 8">
+            <a:extLst>
+              <a:ext uri="{FF2B5EF4-FFF2-40B4-BE49-F238E27FC236}">
+                <a16:creationId xmlns:a16="http://schemas.microsoft.com/office/drawing/2014/main" id="{138095AD-9ABB-4A2C-8C2C-9AE3D72B8356}"/>
               </a:ext>
             </a:extLst>
           </p:cNvPr>
@@ -7712,8 +7712,8 @@
         </p:blipFill>
         <p:spPr>
           <a:xfrm>
-            <a:off x="3517797" y="745225"/>
-            <a:ext cx="4009495" cy="5367550"/>
+            <a:off x="3581400" y="789472"/>
+            <a:ext cx="2810435" cy="5367550"/>
           </a:xfrm>
           <a:prstGeom prst="rect">
             <a:avLst/>
@@ -7722,10 +7722,10 @@
       </p:pic>
       <p:pic>
         <p:nvPicPr>
-          <p:cNvPr id="12" name="Picture 11">
-            <a:extLst>
-              <a:ext uri="{FF2B5EF4-FFF2-40B4-BE49-F238E27FC236}">
-                <a16:creationId xmlns:a16="http://schemas.microsoft.com/office/drawing/2014/main" id="{E7A5B142-2C07-414E-A824-5313E8840AD3}"/>
+          <p:cNvPr id="13" name="Picture 12">
+            <a:extLst>
+              <a:ext uri="{FF2B5EF4-FFF2-40B4-BE49-F238E27FC236}">
+                <a16:creationId xmlns:a16="http://schemas.microsoft.com/office/drawing/2014/main" id="{FE203151-8F32-452D-A8BF-00A38D871D81}"/>
               </a:ext>
             </a:extLst>
           </p:cNvPr>
@@ -7742,8 +7742,68 @@
         </p:blipFill>
         <p:spPr>
           <a:xfrm>
-            <a:off x="7741517" y="745225"/>
-            <a:ext cx="4114799" cy="5367550"/>
+            <a:off x="9677577" y="3683016"/>
+            <a:ext cx="2524433" cy="2692367"/>
+          </a:xfrm>
+          <a:prstGeom prst="rect">
+            <a:avLst/>
+          </a:prstGeom>
+        </p:spPr>
+      </p:pic>
+      <p:pic>
+        <p:nvPicPr>
+          <p:cNvPr id="15" name="Picture 14">
+            <a:extLst>
+              <a:ext uri="{FF2B5EF4-FFF2-40B4-BE49-F238E27FC236}">
+                <a16:creationId xmlns:a16="http://schemas.microsoft.com/office/drawing/2014/main" id="{AD2BEF8A-595B-4399-B863-61874F4D9948}"/>
+              </a:ext>
+            </a:extLst>
+          </p:cNvPr>
+          <p:cNvPicPr>
+            <a:picLocks noChangeAspect="1"/>
+          </p:cNvPicPr>
+          <p:nvPr/>
+        </p:nvPicPr>
+        <p:blipFill>
+          <a:blip r:embed="rId5"/>
+          <a:stretch>
+            <a:fillRect/>
+          </a:stretch>
+        </p:blipFill>
+        <p:spPr>
+          <a:xfrm>
+            <a:off x="9677577" y="663101"/>
+            <a:ext cx="2258131" cy="2692367"/>
+          </a:xfrm>
+          <a:prstGeom prst="rect">
+            <a:avLst/>
+          </a:prstGeom>
+        </p:spPr>
+      </p:pic>
+      <p:pic>
+        <p:nvPicPr>
+          <p:cNvPr id="17" name="Picture 16">
+            <a:extLst>
+              <a:ext uri="{FF2B5EF4-FFF2-40B4-BE49-F238E27FC236}">
+                <a16:creationId xmlns:a16="http://schemas.microsoft.com/office/drawing/2014/main" id="{C6A70228-7DAF-4AB3-A785-343513AB3502}"/>
+              </a:ext>
+            </a:extLst>
+          </p:cNvPr>
+          <p:cNvPicPr>
+            <a:picLocks noChangeAspect="1"/>
+          </p:cNvPicPr>
+          <p:nvPr/>
+        </p:nvPicPr>
+        <p:blipFill>
+          <a:blip r:embed="rId6"/>
+          <a:stretch>
+            <a:fillRect/>
+          </a:stretch>
+        </p:blipFill>
+        <p:spPr>
+          <a:xfrm>
+            <a:off x="6511125" y="879992"/>
+            <a:ext cx="3047161" cy="4149208"/>
           </a:xfrm>
           <a:prstGeom prst="rect">
             <a:avLst/>
@@ -7939,7 +7999,7 @@
           <a:p>
             <a:fld id="{20A639D7-EAE1-7C4A-AC63-30DD6B16DE20}" type="datetime1">
               <a:rPr lang="en-IN" smtClean="0"/>
-              <a:t>09-03-2026</a:t>
+              <a:t>10-03-2026</a:t>
             </a:fld>
             <a:endParaRPr lang="en-US"/>
           </a:p>
@@ -8089,7 +8149,7 @@
           <a:p>
             <a:fld id="{9C5272DB-0103-AF4C-A22D-07421EC406AD}" type="datetime1">
               <a:rPr lang="en-IN" smtClean="0"/>
-              <a:t>09-03-2026</a:t>
+              <a:t>10-03-2026</a:t>
             </a:fld>
             <a:endParaRPr lang="en-US"/>
           </a:p>
@@ -8276,7 +8336,7 @@
           <a:p>
             <a:fld id="{9C5272DB-0103-AF4C-A22D-07421EC406AD}" type="datetime1">
               <a:rPr lang="en-IN" smtClean="0"/>
-              <a:t>09-03-2026</a:t>
+              <a:t>10-03-2026</a:t>
             </a:fld>
             <a:endParaRPr lang="en-US"/>
           </a:p>
@@ -8421,7 +8481,7 @@
           <a:p>
             <a:fld id="{9C5272DB-0103-AF4C-A22D-07421EC406AD}" type="datetime1">
               <a:rPr lang="en-IN" smtClean="0"/>
-              <a:t>09-03-2026</a:t>
+              <a:t>10-03-2026</a:t>
             </a:fld>
             <a:endParaRPr lang="en-US"/>
           </a:p>
@@ -8566,7 +8626,7 @@
           <a:p>
             <a:fld id="{9C5272DB-0103-AF4C-A22D-07421EC406AD}" type="datetime1">
               <a:rPr lang="en-IN" smtClean="0"/>
-              <a:t>09-03-2026</a:t>
+              <a:t>10-03-2026</a:t>
             </a:fld>
             <a:endParaRPr lang="en-US"/>
           </a:p>
@@ -8872,7 +8932,7 @@
           <a:p>
             <a:fld id="{20A639D7-EAE1-7C4A-AC63-30DD6B16DE20}" type="datetime1">
               <a:rPr lang="en-IN" smtClean="0"/>
-              <a:t>09-03-2026</a:t>
+              <a:t>10-03-2026</a:t>
             </a:fld>
             <a:endParaRPr lang="en-US"/>
           </a:p>
@@ -9044,7 +9104,7 @@
           <a:p>
             <a:fld id="{7AAD6276-EBF6-BB4A-A6C6-114A8D55B891}" type="datetime1">
               <a:rPr lang="en-IN" smtClean="0"/>
-              <a:t>09-03-2026</a:t>
+              <a:t>10-03-2026</a:t>
             </a:fld>
             <a:endParaRPr lang="en-US"/>
           </a:p>
@@ -9298,7 +9358,7 @@
           <a:p>
             <a:fld id="{22CB9F02-6AB8-A348-9013-8FCBB8174821}" type="datetime1">
               <a:rPr lang="en-IN" smtClean="0"/>
-              <a:t>09-03-2026</a:t>
+              <a:t>10-03-2026</a:t>
             </a:fld>
             <a:endParaRPr lang="en-US"/>
           </a:p>
@@ -9562,7 +9622,7 @@
           <a:p>
             <a:fld id="{20A639D7-EAE1-7C4A-AC63-30DD6B16DE20}" type="datetime1">
               <a:rPr lang="en-IN" smtClean="0"/>
-              <a:t>09-03-2026</a:t>
+              <a:t>10-03-2026</a:t>
             </a:fld>
             <a:endParaRPr lang="en-US"/>
           </a:p>
@@ -9811,7 +9871,7 @@
           <a:p>
             <a:fld id="{20A639D7-EAE1-7C4A-AC63-30DD6B16DE20}" type="datetime1">
               <a:rPr lang="en-IN" smtClean="0"/>
-              <a:t>09-03-2026</a:t>
+              <a:t>10-03-2026</a:t>
             </a:fld>
             <a:endParaRPr lang="en-US"/>
           </a:p>
@@ -9927,7 +9987,7 @@
           <a:p>
             <a:fld id="{9C5272DB-0103-AF4C-A22D-07421EC406AD}" type="datetime1">
               <a:rPr lang="en-IN" smtClean="0"/>
-              <a:t>09-03-2026</a:t>
+              <a:t>10-03-2026</a:t>
             </a:fld>
             <a:endParaRPr lang="en-US"/>
           </a:p>
@@ -10206,7 +10266,7 @@
           <a:p>
             <a:fld id="{20A639D7-EAE1-7C4A-AC63-30DD6B16DE20}" type="datetime1">
               <a:rPr lang="en-IN" smtClean="0"/>
-              <a:t>09-03-2026</a:t>
+              <a:t>10-03-2026</a:t>
             </a:fld>
             <a:endParaRPr lang="en-US"/>
           </a:p>
@@ -10458,7 +10518,7 @@
           <a:p>
             <a:fld id="{20A639D7-EAE1-7C4A-AC63-30DD6B16DE20}" type="datetime1">
               <a:rPr lang="en-IN" smtClean="0"/>
-              <a:t>09-03-2026</a:t>
+              <a:t>10-03-2026</a:t>
             </a:fld>
             <a:endParaRPr lang="en-US"/>
           </a:p>
@@ -10734,7 +10794,7 @@
           <a:p>
             <a:fld id="{20A639D7-EAE1-7C4A-AC63-30DD6B16DE20}" type="datetime1">
               <a:rPr lang="en-IN" smtClean="0"/>
-              <a:t>09-03-2026</a:t>
+              <a:t>10-03-2026</a:t>
             </a:fld>
             <a:endParaRPr lang="en-US"/>
           </a:p>

--- a/2520030011_CSE.pptx
+++ b/2520030011_CSE.pptx
@@ -6406,7 +6406,31 @@
                   <a:srgbClr val="00B050"/>
                 </a:solidFill>
               </a:rPr>
-              <a:t>Supervisor Name:  N.M. Deepika </a:t>
+              <a:t>Supervisor Name:  Dr. </a:t>
+            </a:r>
+            <a:r>
+              <a:rPr lang="en-US" sz="8600" dirty="0" err="1">
+                <a:solidFill>
+                  <a:srgbClr val="00B050"/>
+                </a:solidFill>
+              </a:rPr>
+              <a:t>Y.Ashok</a:t>
+            </a:r>
+            <a:r>
+              <a:rPr lang="en-US" sz="8600">
+                <a:solidFill>
+                  <a:srgbClr val="00B050"/>
+                </a:solidFill>
+              </a:rPr>
+              <a:t>, N</a:t>
+            </a:r>
+            <a:r>
+              <a:rPr lang="en-US" sz="8600" dirty="0">
+                <a:solidFill>
+                  <a:srgbClr val="00B050"/>
+                </a:solidFill>
+              </a:rPr>
+              <a:t>.M. Deepika </a:t>
             </a:r>
           </a:p>
           <a:p>

--- a/2520030011_CSE.pptx
+++ b/2520030011_CSE.pptx
@@ -6406,7 +6406,7 @@
                   <a:srgbClr val="00B050"/>
                 </a:solidFill>
               </a:rPr>
-              <a:t>Supervisor Name:  Dr. </a:t>
+              <a:t>Supervisor Name:  </a:t>
             </a:r>
             <a:r>
               <a:rPr lang="en-US" sz="8600" dirty="0" err="1">
@@ -6414,15 +6414,7 @@
                   <a:srgbClr val="00B050"/>
                 </a:solidFill>
               </a:rPr>
-              <a:t>Y.Ashok</a:t>
-            </a:r>
-            <a:r>
-              <a:rPr lang="en-US" sz="8600">
-                <a:solidFill>
-                  <a:srgbClr val="00B050"/>
-                </a:solidFill>
-              </a:rPr>
-              <a:t>, N</a:t>
+              <a:t>Dr.Y</a:t>
             </a:r>
             <a:r>
               <a:rPr lang="en-US" sz="8600" dirty="0">
@@ -6430,7 +6422,7 @@
                   <a:srgbClr val="00B050"/>
                 </a:solidFill>
               </a:rPr>
-              <a:t>.M. Deepika </a:t>
+              <a:t>. Ashok, N.M. Deepika </a:t>
             </a:r>
           </a:p>
           <a:p>
